--- a/slides/slide-08.pptx
+++ b/slides/slide-08.pptx
@@ -4373,8 +4373,8 @@
         </p:nvSpPr>
         <p:spPr>
           <a:xfrm xmlns:a="http://schemas.openxmlformats.org/drawingml/2006/main">
-            <a:off x="609480" y="514440"/>
-            <a:ext cx="3333240" cy="313920"/>
+            <a:off x="609600" y="609600"/>
+            <a:ext cx="4438650" cy="304800"/>
           </a:xfrm>
           <a:prstGeom xmlns:a="http://schemas.openxmlformats.org/drawingml/2006/main" prst="rect">
             <a:avLst/>
@@ -4395,80 +4395,110 @@
             <a:noAutofit/>
           </a:bodyPr>
           <a:lstStyle xmlns:a="http://schemas.openxmlformats.org/drawingml/2006/main">
-            <a:defPPr>
-              <a:defRPr>
+            <a:defPPr algn="l">
+              <a:defRPr sz="1500">
+                <a:solidFill>
+                  <a:srgbClr val="65E8D4"/>
+                </a:solidFill>
                 <a:latin typeface="HarmonyOS Sans SC"/>
                 <a:ea typeface="HarmonyOS Sans SC"/>
                 <a:cs typeface="HarmonyOS Sans SC"/>
               </a:defRPr>
             </a:defPPr>
-            <a:lvl1pPr>
-              <a:buNone/>
-              <a:defRPr>
+            <a:lvl1pPr algn="l">
+              <a:buNone/>
+              <a:defRPr sz="1500">
+                <a:solidFill>
+                  <a:srgbClr val="65E8D4"/>
+                </a:solidFill>
                 <a:latin typeface="HarmonyOS Sans SC"/>
                 <a:ea typeface="HarmonyOS Sans SC"/>
                 <a:cs typeface="HarmonyOS Sans SC"/>
               </a:defRPr>
             </a:lvl1pPr>
-            <a:lvl2pPr>
-              <a:buNone/>
-              <a:defRPr>
+            <a:lvl2pPr algn="l">
+              <a:buNone/>
+              <a:defRPr sz="1500">
+                <a:solidFill>
+                  <a:srgbClr val="65E8D4"/>
+                </a:solidFill>
                 <a:latin typeface="HarmonyOS Sans SC"/>
                 <a:ea typeface="HarmonyOS Sans SC"/>
                 <a:cs typeface="HarmonyOS Sans SC"/>
               </a:defRPr>
             </a:lvl2pPr>
-            <a:lvl3pPr>
-              <a:buNone/>
-              <a:defRPr>
+            <a:lvl3pPr algn="l">
+              <a:buNone/>
+              <a:defRPr sz="1500">
+                <a:solidFill>
+                  <a:srgbClr val="65E8D4"/>
+                </a:solidFill>
                 <a:latin typeface="HarmonyOS Sans SC"/>
                 <a:ea typeface="HarmonyOS Sans SC"/>
                 <a:cs typeface="HarmonyOS Sans SC"/>
               </a:defRPr>
             </a:lvl3pPr>
-            <a:lvl4pPr>
-              <a:buNone/>
-              <a:defRPr>
+            <a:lvl4pPr algn="l">
+              <a:buNone/>
+              <a:defRPr sz="1500">
+                <a:solidFill>
+                  <a:srgbClr val="65E8D4"/>
+                </a:solidFill>
                 <a:latin typeface="HarmonyOS Sans SC"/>
                 <a:ea typeface="HarmonyOS Sans SC"/>
                 <a:cs typeface="HarmonyOS Sans SC"/>
               </a:defRPr>
             </a:lvl4pPr>
-            <a:lvl5pPr>
-              <a:buNone/>
-              <a:defRPr>
+            <a:lvl5pPr algn="l">
+              <a:buNone/>
+              <a:defRPr sz="1500">
+                <a:solidFill>
+                  <a:srgbClr val="65E8D4"/>
+                </a:solidFill>
                 <a:latin typeface="HarmonyOS Sans SC"/>
                 <a:ea typeface="HarmonyOS Sans SC"/>
                 <a:cs typeface="HarmonyOS Sans SC"/>
               </a:defRPr>
             </a:lvl5pPr>
-            <a:lvl6pPr>
-              <a:buNone/>
-              <a:defRPr>
+            <a:lvl6pPr algn="l">
+              <a:buNone/>
+              <a:defRPr sz="1500">
+                <a:solidFill>
+                  <a:srgbClr val="65E8D4"/>
+                </a:solidFill>
                 <a:latin typeface="HarmonyOS Sans SC"/>
                 <a:ea typeface="HarmonyOS Sans SC"/>
                 <a:cs typeface="HarmonyOS Sans SC"/>
               </a:defRPr>
             </a:lvl6pPr>
-            <a:lvl7pPr>
-              <a:buNone/>
-              <a:defRPr>
+            <a:lvl7pPr algn="l">
+              <a:buNone/>
+              <a:defRPr sz="1500">
+                <a:solidFill>
+                  <a:srgbClr val="65E8D4"/>
+                </a:solidFill>
                 <a:latin typeface="HarmonyOS Sans SC"/>
                 <a:ea typeface="HarmonyOS Sans SC"/>
                 <a:cs typeface="HarmonyOS Sans SC"/>
               </a:defRPr>
             </a:lvl7pPr>
-            <a:lvl8pPr>
-              <a:buNone/>
-              <a:defRPr>
+            <a:lvl8pPr algn="l">
+              <a:buNone/>
+              <a:defRPr sz="1500">
+                <a:solidFill>
+                  <a:srgbClr val="65E8D4"/>
+                </a:solidFill>
                 <a:latin typeface="HarmonyOS Sans SC"/>
                 <a:ea typeface="HarmonyOS Sans SC"/>
                 <a:cs typeface="HarmonyOS Sans SC"/>
               </a:defRPr>
             </a:lvl8pPr>
-            <a:lvl9pPr>
-              <a:buNone/>
-              <a:defRPr>
+            <a:lvl9pPr algn="l">
+              <a:buNone/>
+              <a:defRPr sz="1500">
+                <a:solidFill>
+                  <a:srgbClr val="65E8D4"/>
+                </a:solidFill>
                 <a:latin typeface="HarmonyOS Sans SC"/>
                 <a:ea typeface="HarmonyOS Sans SC"/>
                 <a:cs typeface="HarmonyOS Sans SC"/>
@@ -4476,21 +4506,24 @@
             </a:lvl9pPr>
           </a:lstStyle>
           <a:p xmlns:a="http://schemas.openxmlformats.org/drawingml/2006/main">
-            <a:pPr>
+            <a:pPr algn="l">
               <a:lnSpc>
                 <a:spcPct val="116000"/>
               </a:lnSpc>
               <a:buNone/>
-              <a:defRPr>
+              <a:defRPr sz="1500">
+                <a:solidFill>
+                  <a:srgbClr val="65E8D4"/>
+                </a:solidFill>
                 <a:latin typeface="HarmonyOS Sans SC"/>
                 <a:ea typeface="HarmonyOS Sans SC"/>
                 <a:cs typeface="HarmonyOS Sans SC"/>
               </a:defRPr>
             </a:pPr>
             <a:r>
-              <a:rPr sz="1729" b="1" u="none" strike="noStrike">
-                <a:solidFill>
-                  <a:srgbClr val="ED4EC4"/>
+              <a:rPr sz="1500" b="1" u="none" strike="noStrike">
+                <a:solidFill>
+                  <a:srgbClr val="65E8D4"/>
                 </a:solidFill>
                 <a:latin typeface="HarmonyOS Sans SC"/>
                 <a:ea typeface="HarmonyOS Sans SC"/>
@@ -4525,8 +4558,8 @@
         </p:nvSpPr>
         <p:spPr>
           <a:xfrm xmlns:a="http://schemas.openxmlformats.org/drawingml/2006/main">
-            <a:off x="609480" y="1152360"/>
-            <a:ext cx="10953360" cy="1390320"/>
+            <a:off x="609600" y="1219200"/>
+            <a:ext cx="10972800" cy="1524000"/>
           </a:xfrm>
           <a:prstGeom xmlns:a="http://schemas.openxmlformats.org/drawingml/2006/main" prst="rect">
             <a:avLst/>
@@ -4547,80 +4580,80 @@
             <a:noAutofit/>
           </a:bodyPr>
           <a:lstStyle xmlns:a="http://schemas.openxmlformats.org/drawingml/2006/main">
-            <a:defPPr>
-              <a:defRPr>
+            <a:defPPr algn="l">
+              <a:defRPr sz="4500">
                 <a:latin typeface="HarmonyOS Sans SC"/>
                 <a:ea typeface="HarmonyOS Sans SC"/>
                 <a:cs typeface="HarmonyOS Sans SC"/>
               </a:defRPr>
             </a:defPPr>
-            <a:lvl1pPr>
-              <a:buNone/>
-              <a:defRPr>
+            <a:lvl1pPr algn="l">
+              <a:buNone/>
+              <a:defRPr sz="4500">
                 <a:latin typeface="HarmonyOS Sans SC"/>
                 <a:ea typeface="HarmonyOS Sans SC"/>
                 <a:cs typeface="HarmonyOS Sans SC"/>
               </a:defRPr>
             </a:lvl1pPr>
-            <a:lvl2pPr>
-              <a:buNone/>
-              <a:defRPr>
+            <a:lvl2pPr algn="l">
+              <a:buNone/>
+              <a:defRPr sz="4500">
                 <a:latin typeface="HarmonyOS Sans SC"/>
                 <a:ea typeface="HarmonyOS Sans SC"/>
                 <a:cs typeface="HarmonyOS Sans SC"/>
               </a:defRPr>
             </a:lvl2pPr>
-            <a:lvl3pPr>
-              <a:buNone/>
-              <a:defRPr>
+            <a:lvl3pPr algn="l">
+              <a:buNone/>
+              <a:defRPr sz="4500">
                 <a:latin typeface="HarmonyOS Sans SC"/>
                 <a:ea typeface="HarmonyOS Sans SC"/>
                 <a:cs typeface="HarmonyOS Sans SC"/>
               </a:defRPr>
             </a:lvl3pPr>
-            <a:lvl4pPr>
-              <a:buNone/>
-              <a:defRPr>
+            <a:lvl4pPr algn="l">
+              <a:buNone/>
+              <a:defRPr sz="4500">
                 <a:latin typeface="HarmonyOS Sans SC"/>
                 <a:ea typeface="HarmonyOS Sans SC"/>
                 <a:cs typeface="HarmonyOS Sans SC"/>
               </a:defRPr>
             </a:lvl4pPr>
-            <a:lvl5pPr>
-              <a:buNone/>
-              <a:defRPr>
+            <a:lvl5pPr algn="l">
+              <a:buNone/>
+              <a:defRPr sz="4500">
                 <a:latin typeface="HarmonyOS Sans SC"/>
                 <a:ea typeface="HarmonyOS Sans SC"/>
                 <a:cs typeface="HarmonyOS Sans SC"/>
               </a:defRPr>
             </a:lvl5pPr>
-            <a:lvl6pPr>
-              <a:buNone/>
-              <a:defRPr>
+            <a:lvl6pPr algn="l">
+              <a:buNone/>
+              <a:defRPr sz="4500">
                 <a:latin typeface="HarmonyOS Sans SC"/>
                 <a:ea typeface="HarmonyOS Sans SC"/>
                 <a:cs typeface="HarmonyOS Sans SC"/>
               </a:defRPr>
             </a:lvl6pPr>
-            <a:lvl7pPr>
-              <a:buNone/>
-              <a:defRPr>
+            <a:lvl7pPr algn="l">
+              <a:buNone/>
+              <a:defRPr sz="4500">
                 <a:latin typeface="HarmonyOS Sans SC"/>
                 <a:ea typeface="HarmonyOS Sans SC"/>
                 <a:cs typeface="HarmonyOS Sans SC"/>
               </a:defRPr>
             </a:lvl7pPr>
-            <a:lvl8pPr>
-              <a:buNone/>
-              <a:defRPr>
+            <a:lvl8pPr algn="l">
+              <a:buNone/>
+              <a:defRPr sz="4500">
                 <a:latin typeface="HarmonyOS Sans SC"/>
                 <a:ea typeface="HarmonyOS Sans SC"/>
                 <a:cs typeface="HarmonyOS Sans SC"/>
               </a:defRPr>
             </a:lvl8pPr>
-            <a:lvl9pPr>
-              <a:buNone/>
-              <a:defRPr>
+            <a:lvl9pPr algn="l">
+              <a:buNone/>
+              <a:defRPr sz="4500">
                 <a:latin typeface="HarmonyOS Sans SC"/>
                 <a:ea typeface="HarmonyOS Sans SC"/>
                 <a:cs typeface="HarmonyOS Sans SC"/>
@@ -4628,19 +4661,19 @@
             </a:lvl9pPr>
           </a:lstStyle>
           <a:p xmlns:a="http://schemas.openxmlformats.org/drawingml/2006/main">
-            <a:pPr>
+            <a:pPr algn="l">
               <a:lnSpc>
                 <a:spcPct val="116000"/>
               </a:lnSpc>
               <a:buNone/>
-              <a:defRPr>
+              <a:defRPr sz="4500">
                 <a:latin typeface="HarmonyOS Sans SC"/>
                 <a:ea typeface="HarmonyOS Sans SC"/>
                 <a:cs typeface="HarmonyOS Sans SC"/>
               </a:defRPr>
             </a:pPr>
             <a:r>
-              <a:rPr sz="4200" b="1" u="none" strike="noStrike">
+              <a:rPr sz="4500" b="1" u="none" strike="noStrike">
                 <a:solidFill>
                   <a:srgbClr val="F7F7F2"/>
                 </a:solidFill>
@@ -4660,19 +4693,19 @@
             </a:endParaRPr>
           </a:p>
           <a:p xmlns:a="http://schemas.openxmlformats.org/drawingml/2006/main">
-            <a:pPr>
+            <a:pPr algn="l">
               <a:lnSpc>
                 <a:spcPct val="116000"/>
               </a:lnSpc>
               <a:buNone/>
-              <a:defRPr>
+              <a:defRPr sz="4500">
                 <a:latin typeface="HarmonyOS Sans SC"/>
                 <a:ea typeface="HarmonyOS Sans SC"/>
                 <a:cs typeface="HarmonyOS Sans SC"/>
               </a:defRPr>
             </a:pPr>
             <a:r>
-              <a:rPr sz="4200" b="1" u="none" strike="noStrike">
+              <a:rPr sz="4500" b="1" u="none" strike="noStrike">
                 <a:solidFill>
                   <a:srgbClr val="F7F7F2"/>
                 </a:solidFill>
@@ -4709,8 +4742,8 @@
         </p:nvSpPr>
         <p:spPr>
           <a:xfrm xmlns:a="http://schemas.openxmlformats.org/drawingml/2006/main">
-            <a:off x="609480" y="3067200"/>
-            <a:ext cx="10762920" cy="1199880"/>
+            <a:off x="6210300" y="3505200"/>
+            <a:ext cx="5372100" cy="990600"/>
           </a:xfrm>
           <a:prstGeom xmlns:a="http://schemas.openxmlformats.org/drawingml/2006/main" prst="rect">
             <a:avLst/>
@@ -4731,80 +4764,110 @@
             <a:noAutofit/>
           </a:bodyPr>
           <a:lstStyle xmlns:a="http://schemas.openxmlformats.org/drawingml/2006/main">
-            <a:defPPr>
-              <a:defRPr>
+            <a:defPPr algn="l">
+              <a:defRPr sz="4800">
+                <a:solidFill>
+                  <a:srgbClr val="65E8D4"/>
+                </a:solidFill>
                 <a:latin typeface="HarmonyOS Sans SC"/>
                 <a:ea typeface="HarmonyOS Sans SC"/>
                 <a:cs typeface="HarmonyOS Sans SC"/>
               </a:defRPr>
             </a:defPPr>
-            <a:lvl1pPr>
-              <a:buNone/>
-              <a:defRPr>
+            <a:lvl1pPr algn="l">
+              <a:buNone/>
+              <a:defRPr sz="4800">
+                <a:solidFill>
+                  <a:srgbClr val="65E8D4"/>
+                </a:solidFill>
                 <a:latin typeface="HarmonyOS Sans SC"/>
                 <a:ea typeface="HarmonyOS Sans SC"/>
                 <a:cs typeface="HarmonyOS Sans SC"/>
               </a:defRPr>
             </a:lvl1pPr>
-            <a:lvl2pPr>
-              <a:buNone/>
-              <a:defRPr>
+            <a:lvl2pPr algn="l">
+              <a:buNone/>
+              <a:defRPr sz="4800">
+                <a:solidFill>
+                  <a:srgbClr val="65E8D4"/>
+                </a:solidFill>
                 <a:latin typeface="HarmonyOS Sans SC"/>
                 <a:ea typeface="HarmonyOS Sans SC"/>
                 <a:cs typeface="HarmonyOS Sans SC"/>
               </a:defRPr>
             </a:lvl2pPr>
-            <a:lvl3pPr>
-              <a:buNone/>
-              <a:defRPr>
+            <a:lvl3pPr algn="l">
+              <a:buNone/>
+              <a:defRPr sz="4800">
+                <a:solidFill>
+                  <a:srgbClr val="65E8D4"/>
+                </a:solidFill>
                 <a:latin typeface="HarmonyOS Sans SC"/>
                 <a:ea typeface="HarmonyOS Sans SC"/>
                 <a:cs typeface="HarmonyOS Sans SC"/>
               </a:defRPr>
             </a:lvl3pPr>
-            <a:lvl4pPr>
-              <a:buNone/>
-              <a:defRPr>
+            <a:lvl4pPr algn="l">
+              <a:buNone/>
+              <a:defRPr sz="4800">
+                <a:solidFill>
+                  <a:srgbClr val="65E8D4"/>
+                </a:solidFill>
                 <a:latin typeface="HarmonyOS Sans SC"/>
                 <a:ea typeface="HarmonyOS Sans SC"/>
                 <a:cs typeface="HarmonyOS Sans SC"/>
               </a:defRPr>
             </a:lvl4pPr>
-            <a:lvl5pPr>
-              <a:buNone/>
-              <a:defRPr>
+            <a:lvl5pPr algn="l">
+              <a:buNone/>
+              <a:defRPr sz="4800">
+                <a:solidFill>
+                  <a:srgbClr val="65E8D4"/>
+                </a:solidFill>
                 <a:latin typeface="HarmonyOS Sans SC"/>
                 <a:ea typeface="HarmonyOS Sans SC"/>
                 <a:cs typeface="HarmonyOS Sans SC"/>
               </a:defRPr>
             </a:lvl5pPr>
-            <a:lvl6pPr>
-              <a:buNone/>
-              <a:defRPr>
+            <a:lvl6pPr algn="l">
+              <a:buNone/>
+              <a:defRPr sz="4800">
+                <a:solidFill>
+                  <a:srgbClr val="65E8D4"/>
+                </a:solidFill>
                 <a:latin typeface="HarmonyOS Sans SC"/>
                 <a:ea typeface="HarmonyOS Sans SC"/>
                 <a:cs typeface="HarmonyOS Sans SC"/>
               </a:defRPr>
             </a:lvl6pPr>
-            <a:lvl7pPr>
-              <a:buNone/>
-              <a:defRPr>
+            <a:lvl7pPr algn="l">
+              <a:buNone/>
+              <a:defRPr sz="4800">
+                <a:solidFill>
+                  <a:srgbClr val="65E8D4"/>
+                </a:solidFill>
                 <a:latin typeface="HarmonyOS Sans SC"/>
                 <a:ea typeface="HarmonyOS Sans SC"/>
                 <a:cs typeface="HarmonyOS Sans SC"/>
               </a:defRPr>
             </a:lvl7pPr>
-            <a:lvl8pPr>
-              <a:buNone/>
-              <a:defRPr>
+            <a:lvl8pPr algn="l">
+              <a:buNone/>
+              <a:defRPr sz="4800">
+                <a:solidFill>
+                  <a:srgbClr val="65E8D4"/>
+                </a:solidFill>
                 <a:latin typeface="HarmonyOS Sans SC"/>
                 <a:ea typeface="HarmonyOS Sans SC"/>
                 <a:cs typeface="HarmonyOS Sans SC"/>
               </a:defRPr>
             </a:lvl8pPr>
-            <a:lvl9pPr>
-              <a:buNone/>
-              <a:defRPr>
+            <a:lvl9pPr algn="l">
+              <a:buNone/>
+              <a:defRPr sz="4800">
+                <a:solidFill>
+                  <a:srgbClr val="65E8D4"/>
+                </a:solidFill>
                 <a:latin typeface="HarmonyOS Sans SC"/>
                 <a:ea typeface="HarmonyOS Sans SC"/>
                 <a:cs typeface="HarmonyOS Sans SC"/>
@@ -4812,19 +4875,22 @@
             </a:lvl9pPr>
           </a:lstStyle>
           <a:p xmlns:a="http://schemas.openxmlformats.org/drawingml/2006/main">
-            <a:pPr>
+            <a:pPr algn="l">
               <a:lnSpc>
                 <a:spcPct val="116000"/>
               </a:lnSpc>
               <a:buNone/>
-              <a:defRPr>
+              <a:defRPr sz="4800">
+                <a:solidFill>
+                  <a:srgbClr val="65E8D4"/>
+                </a:solidFill>
                 <a:latin typeface="HarmonyOS Sans SC"/>
                 <a:ea typeface="HarmonyOS Sans SC"/>
                 <a:cs typeface="HarmonyOS Sans SC"/>
               </a:defRPr>
             </a:pPr>
             <a:r>
-              <a:rPr sz="7200" b="1" u="sng" strike="noStrike">
+              <a:rPr sz="4800" b="1" u="sng" strike="noStrike">
                 <a:solidFill>
                   <a:srgbClr val="65E8D4"/>
                 </a:solidFill>
@@ -4862,8 +4928,8 @@
         </p:nvSpPr>
         <p:spPr>
           <a:xfrm xmlns:a="http://schemas.openxmlformats.org/drawingml/2006/main">
-            <a:off x="628560" y="4552920"/>
-            <a:ext cx="10801080" cy="495000"/>
+            <a:off x="609600" y="3657600"/>
+            <a:ext cx="4438650" cy="1066800"/>
           </a:xfrm>
           <a:prstGeom xmlns:a="http://schemas.openxmlformats.org/drawingml/2006/main" prst="rect">
             <a:avLst/>
@@ -4884,80 +4950,80 @@
             <a:noAutofit/>
           </a:bodyPr>
           <a:lstStyle xmlns:a="http://schemas.openxmlformats.org/drawingml/2006/main">
-            <a:defPPr>
-              <a:defRPr>
+            <a:defPPr algn="l">
+              <a:defRPr sz="2100">
                 <a:latin typeface="HarmonyOS Sans SC"/>
                 <a:ea typeface="HarmonyOS Sans SC"/>
                 <a:cs typeface="HarmonyOS Sans SC"/>
               </a:defRPr>
             </a:defPPr>
-            <a:lvl1pPr>
-              <a:buNone/>
-              <a:defRPr>
+            <a:lvl1pPr algn="l">
+              <a:buNone/>
+              <a:defRPr sz="2100">
                 <a:latin typeface="HarmonyOS Sans SC"/>
                 <a:ea typeface="HarmonyOS Sans SC"/>
                 <a:cs typeface="HarmonyOS Sans SC"/>
               </a:defRPr>
             </a:lvl1pPr>
-            <a:lvl2pPr>
-              <a:buNone/>
-              <a:defRPr>
+            <a:lvl2pPr algn="l">
+              <a:buNone/>
+              <a:defRPr sz="2100">
                 <a:latin typeface="HarmonyOS Sans SC"/>
                 <a:ea typeface="HarmonyOS Sans SC"/>
                 <a:cs typeface="HarmonyOS Sans SC"/>
               </a:defRPr>
             </a:lvl2pPr>
-            <a:lvl3pPr>
-              <a:buNone/>
-              <a:defRPr>
+            <a:lvl3pPr algn="l">
+              <a:buNone/>
+              <a:defRPr sz="2100">
                 <a:latin typeface="HarmonyOS Sans SC"/>
                 <a:ea typeface="HarmonyOS Sans SC"/>
                 <a:cs typeface="HarmonyOS Sans SC"/>
               </a:defRPr>
             </a:lvl3pPr>
-            <a:lvl4pPr>
-              <a:buNone/>
-              <a:defRPr>
+            <a:lvl4pPr algn="l">
+              <a:buNone/>
+              <a:defRPr sz="2100">
                 <a:latin typeface="HarmonyOS Sans SC"/>
                 <a:ea typeface="HarmonyOS Sans SC"/>
                 <a:cs typeface="HarmonyOS Sans SC"/>
               </a:defRPr>
             </a:lvl4pPr>
-            <a:lvl5pPr>
-              <a:buNone/>
-              <a:defRPr>
+            <a:lvl5pPr algn="l">
+              <a:buNone/>
+              <a:defRPr sz="2100">
                 <a:latin typeface="HarmonyOS Sans SC"/>
                 <a:ea typeface="HarmonyOS Sans SC"/>
                 <a:cs typeface="HarmonyOS Sans SC"/>
               </a:defRPr>
             </a:lvl5pPr>
-            <a:lvl6pPr>
-              <a:buNone/>
-              <a:defRPr>
+            <a:lvl6pPr algn="l">
+              <a:buNone/>
+              <a:defRPr sz="2100">
                 <a:latin typeface="HarmonyOS Sans SC"/>
                 <a:ea typeface="HarmonyOS Sans SC"/>
                 <a:cs typeface="HarmonyOS Sans SC"/>
               </a:defRPr>
             </a:lvl6pPr>
-            <a:lvl7pPr>
-              <a:buNone/>
-              <a:defRPr>
+            <a:lvl7pPr algn="l">
+              <a:buNone/>
+              <a:defRPr sz="2100">
                 <a:latin typeface="HarmonyOS Sans SC"/>
                 <a:ea typeface="HarmonyOS Sans SC"/>
                 <a:cs typeface="HarmonyOS Sans SC"/>
               </a:defRPr>
             </a:lvl7pPr>
-            <a:lvl8pPr>
-              <a:buNone/>
-              <a:defRPr>
+            <a:lvl8pPr algn="l">
+              <a:buNone/>
+              <a:defRPr sz="2100">
                 <a:latin typeface="HarmonyOS Sans SC"/>
                 <a:ea typeface="HarmonyOS Sans SC"/>
                 <a:cs typeface="HarmonyOS Sans SC"/>
               </a:defRPr>
             </a:lvl8pPr>
-            <a:lvl9pPr>
-              <a:buNone/>
-              <a:defRPr>
+            <a:lvl9pPr algn="l">
+              <a:buNone/>
+              <a:defRPr sz="2100">
                 <a:latin typeface="HarmonyOS Sans SC"/>
                 <a:ea typeface="HarmonyOS Sans SC"/>
                 <a:cs typeface="HarmonyOS Sans SC"/>
@@ -4965,19 +5031,19 @@
             </a:lvl9pPr>
           </a:lstStyle>
           <a:p xmlns:a="http://schemas.openxmlformats.org/drawingml/2006/main">
-            <a:pPr>
+            <a:pPr algn="l">
               <a:lnSpc>
                 <a:spcPct val="116000"/>
               </a:lnSpc>
               <a:buNone/>
-              <a:defRPr>
+              <a:defRPr sz="2100">
                 <a:latin typeface="HarmonyOS Sans SC"/>
                 <a:ea typeface="HarmonyOS Sans SC"/>
                 <a:cs typeface="HarmonyOS Sans SC"/>
               </a:defRPr>
             </a:pPr>
             <a:r>
-              <a:rPr sz="2470" b="0" u="none" strike="noStrike">
+              <a:rPr sz="2100" b="0" u="none" strike="noStrike">
                 <a:solidFill>
                   <a:srgbClr val="F7F7F2"/>
                 </a:solidFill>
@@ -4985,7 +5051,39 @@
                 <a:ea typeface="HarmonyOS Sans SC"/>
                 <a:cs typeface="HarmonyOS Sans SC"/>
               </a:rPr>
-              <a:t>运行应用，观察效果，再修改一个想法</a:t>
+              <a:t>运行应用，观察效果，</a:t>
+            </a:r>
+            <a:endParaRPr sz="2470" b="0" u="none" strike="noStrike">
+              <a:solidFill>
+                <a:srgbClr val="FFFFFF"/>
+              </a:solidFill>
+              <a:latin typeface="Arial"/>
+              <a:ea typeface="Arial"/>
+              <a:cs typeface="Arial"/>
+            </a:endParaRPr>
+          </a:p>
+          <a:p xmlns:a="http://schemas.openxmlformats.org/drawingml/2006/main">
+            <a:pPr algn="l">
+              <a:lnSpc>
+                <a:spcPct val="116000"/>
+              </a:lnSpc>
+              <a:buNone/>
+              <a:defRPr sz="2100">
+                <a:latin typeface="HarmonyOS Sans SC"/>
+                <a:ea typeface="HarmonyOS Sans SC"/>
+                <a:cs typeface="HarmonyOS Sans SC"/>
+              </a:defRPr>
+            </a:pPr>
+            <a:r>
+              <a:rPr sz="2100" b="0" u="none" strike="noStrike">
+                <a:solidFill>
+                  <a:srgbClr val="F7F7F2"/>
+                </a:solidFill>
+                <a:latin typeface="HarmonyOS Sans SC"/>
+                <a:ea typeface="HarmonyOS Sans SC"/>
+                <a:cs typeface="HarmonyOS Sans SC"/>
+              </a:rPr>
+              <a:t>再修改一个想法</a:t>
             </a:r>
             <a:endParaRPr sz="2470" b="0" u="none" strike="noStrike">
               <a:solidFill>
@@ -5014,8 +5112,8 @@
         </p:nvSpPr>
         <p:spPr>
           <a:xfrm xmlns:a="http://schemas.openxmlformats.org/drawingml/2006/main">
-            <a:off x="628560" y="5553000"/>
-            <a:ext cx="10801080" cy="495000"/>
+            <a:off x="6210300" y="5181600"/>
+            <a:ext cx="5372100" cy="762000"/>
           </a:xfrm>
           <a:prstGeom xmlns:a="http://schemas.openxmlformats.org/drawingml/2006/main" prst="rect">
             <a:avLst/>
@@ -5036,80 +5134,80 @@
             <a:noAutofit/>
           </a:bodyPr>
           <a:lstStyle xmlns:a="http://schemas.openxmlformats.org/drawingml/2006/main">
-            <a:defPPr>
-              <a:defRPr>
+            <a:defPPr algn="l">
+              <a:defRPr sz="1800">
                 <a:latin typeface="HarmonyOS Sans SC"/>
                 <a:ea typeface="HarmonyOS Sans SC"/>
                 <a:cs typeface="HarmonyOS Sans SC"/>
               </a:defRPr>
             </a:defPPr>
-            <a:lvl1pPr>
-              <a:buNone/>
-              <a:defRPr>
+            <a:lvl1pPr algn="l">
+              <a:buNone/>
+              <a:defRPr sz="1800">
                 <a:latin typeface="HarmonyOS Sans SC"/>
                 <a:ea typeface="HarmonyOS Sans SC"/>
                 <a:cs typeface="HarmonyOS Sans SC"/>
               </a:defRPr>
             </a:lvl1pPr>
-            <a:lvl2pPr>
-              <a:buNone/>
-              <a:defRPr>
+            <a:lvl2pPr algn="l">
+              <a:buNone/>
+              <a:defRPr sz="1800">
                 <a:latin typeface="HarmonyOS Sans SC"/>
                 <a:ea typeface="HarmonyOS Sans SC"/>
                 <a:cs typeface="HarmonyOS Sans SC"/>
               </a:defRPr>
             </a:lvl2pPr>
-            <a:lvl3pPr>
-              <a:buNone/>
-              <a:defRPr>
+            <a:lvl3pPr algn="l">
+              <a:buNone/>
+              <a:defRPr sz="1800">
                 <a:latin typeface="HarmonyOS Sans SC"/>
                 <a:ea typeface="HarmonyOS Sans SC"/>
                 <a:cs typeface="HarmonyOS Sans SC"/>
               </a:defRPr>
             </a:lvl3pPr>
-            <a:lvl4pPr>
-              <a:buNone/>
-              <a:defRPr>
+            <a:lvl4pPr algn="l">
+              <a:buNone/>
+              <a:defRPr sz="1800">
                 <a:latin typeface="HarmonyOS Sans SC"/>
                 <a:ea typeface="HarmonyOS Sans SC"/>
                 <a:cs typeface="HarmonyOS Sans SC"/>
               </a:defRPr>
             </a:lvl4pPr>
-            <a:lvl5pPr>
-              <a:buNone/>
-              <a:defRPr>
+            <a:lvl5pPr algn="l">
+              <a:buNone/>
+              <a:defRPr sz="1800">
                 <a:latin typeface="HarmonyOS Sans SC"/>
                 <a:ea typeface="HarmonyOS Sans SC"/>
                 <a:cs typeface="HarmonyOS Sans SC"/>
               </a:defRPr>
             </a:lvl5pPr>
-            <a:lvl6pPr>
-              <a:buNone/>
-              <a:defRPr>
+            <a:lvl6pPr algn="l">
+              <a:buNone/>
+              <a:defRPr sz="1800">
                 <a:latin typeface="HarmonyOS Sans SC"/>
                 <a:ea typeface="HarmonyOS Sans SC"/>
                 <a:cs typeface="HarmonyOS Sans SC"/>
               </a:defRPr>
             </a:lvl6pPr>
-            <a:lvl7pPr>
-              <a:buNone/>
-              <a:defRPr>
+            <a:lvl7pPr algn="l">
+              <a:buNone/>
+              <a:defRPr sz="1800">
                 <a:latin typeface="HarmonyOS Sans SC"/>
                 <a:ea typeface="HarmonyOS Sans SC"/>
                 <a:cs typeface="HarmonyOS Sans SC"/>
               </a:defRPr>
             </a:lvl7pPr>
-            <a:lvl8pPr>
-              <a:buNone/>
-              <a:defRPr>
+            <a:lvl8pPr algn="l">
+              <a:buNone/>
+              <a:defRPr sz="1800">
                 <a:latin typeface="HarmonyOS Sans SC"/>
                 <a:ea typeface="HarmonyOS Sans SC"/>
                 <a:cs typeface="HarmonyOS Sans SC"/>
               </a:defRPr>
             </a:lvl8pPr>
-            <a:lvl9pPr>
-              <a:buNone/>
-              <a:defRPr>
+            <a:lvl9pPr algn="l">
+              <a:buNone/>
+              <a:defRPr sz="1800">
                 <a:latin typeface="HarmonyOS Sans SC"/>
                 <a:ea typeface="HarmonyOS Sans SC"/>
                 <a:cs typeface="HarmonyOS Sans SC"/>
@@ -5117,19 +5215,19 @@
             </a:lvl9pPr>
           </a:lstStyle>
           <a:p xmlns:a="http://schemas.openxmlformats.org/drawingml/2006/main">
-            <a:pPr>
+            <a:pPr algn="l">
               <a:lnSpc>
                 <a:spcPct val="116000"/>
               </a:lnSpc>
               <a:buNone/>
-              <a:defRPr>
+              <a:defRPr sz="1800">
                 <a:latin typeface="HarmonyOS Sans SC"/>
                 <a:ea typeface="HarmonyOS Sans SC"/>
                 <a:cs typeface="HarmonyOS Sans SC"/>
               </a:defRPr>
             </a:pPr>
             <a:r>
-              <a:rPr sz="2400" b="0" u="none" strike="noStrike">
+              <a:rPr sz="1800" b="0" u="none" strike="noStrike">
                 <a:solidFill>
                   <a:srgbClr val="A6A7B2"/>
                 </a:solidFill>
@@ -5176,7 +5274,7 @@
         </p:blipFill>
         <p:spPr>
           <a:xfrm xmlns:a="http://schemas.openxmlformats.org/drawingml/2006/main">
-            <a:off x="609600" y="6524625"/>
+            <a:off x="609600" y="6400800"/>
             <a:ext cx="1952625" cy="228220"/>
           </a:xfrm>
           <a:prstGeom xmlns:a="http://schemas.openxmlformats.org/drawingml/2006/main" prst="rect">
@@ -5200,8 +5298,8 @@
         </p:nvSpPr>
         <p:spPr>
           <a:xfrm xmlns:a="http://schemas.openxmlformats.org/drawingml/2006/main">
-            <a:off x="11191875" y="6505575"/>
-            <a:ext cx="419100" cy="247650"/>
+            <a:off x="11163300" y="6400800"/>
+            <a:ext cx="419100" cy="228600"/>
           </a:xfrm>
           <a:prstGeom xmlns:a="http://schemas.openxmlformats.org/drawingml/2006/main" prst="rect">
             <a:avLst/>
@@ -5212,7 +5310,7 @@
           </a:ln>
         </p:spPr>
         <p:txBody>
-          <a:bodyPr xmlns:a="http://schemas.openxmlformats.org/drawingml/2006/main" wrap="none" lIns="0" tIns="0" rIns="0" bIns="0" anchor="ctr">
+          <a:bodyPr xmlns:a="http://schemas.openxmlformats.org/drawingml/2006/main" wrap="none" lIns="0" tIns="0" rIns="0" bIns="0" anchor="t">
             <a:noAutofit/>
           </a:bodyPr>
           <a:lstStyle xmlns:a="http://schemas.openxmlformats.org/drawingml/2006/main">
